--- a/slides/slide-06.pptx
+++ b/slides/slide-06.pptx
@@ -4170,8 +4170,8 @@
         </p:nvSpPr>
         <p:spPr>
           <a:xfrm xmlns:a="http://schemas.openxmlformats.org/drawingml/2006/main">
-            <a:off x="609600" y="2476500"/>
-            <a:ext cx="10972800" cy="1905000"/>
+            <a:off x="609600" y="2057400"/>
+            <a:ext cx="8172450" cy="2133600"/>
           </a:xfrm>
           <a:prstGeom xmlns:a="http://schemas.openxmlformats.org/drawingml/2006/main" prst="rect">
             <a:avLst/>
@@ -4182,12 +4182,12 @@
           </a:ln>
         </p:spPr>
         <p:txBody>
-          <a:bodyPr xmlns:a="http://schemas.openxmlformats.org/drawingml/2006/main" wrap="none" lIns="0" tIns="0" rIns="0" bIns="0" anchor="ctr">
+          <a:bodyPr xmlns:a="http://schemas.openxmlformats.org/drawingml/2006/main" wrap="none" lIns="0" tIns="0" rIns="0" bIns="0" anchor="t">
             <a:noAutofit/>
           </a:bodyPr>
           <a:lstStyle xmlns:a="http://schemas.openxmlformats.org/drawingml/2006/main">
-            <a:defPPr algn="ctr">
-              <a:defRPr sz="7875" b="1">
+            <a:defPPr algn="l">
+              <a:defRPr sz="12000" b="1">
                 <a:solidFill>
                   <a:srgbClr val="F7F7F2"/>
                 </a:solidFill>
@@ -4297,12 +4297,12 @@
             </a:lvl9pPr>
           </a:lstStyle>
           <a:p xmlns:a="http://schemas.openxmlformats.org/drawingml/2006/main">
-            <a:pPr algn="ctr">
+            <a:pPr algn="l">
               <a:lnSpc>
                 <a:spcPct val="115000"/>
               </a:lnSpc>
               <a:buNone/>
-              <a:defRPr sz="7875" b="1">
+              <a:defRPr sz="12000" b="1">
                 <a:solidFill>
                   <a:srgbClr val="F7F7F2"/>
                 </a:solidFill>
@@ -4312,7 +4312,7 @@
               </a:defRPr>
             </a:pPr>
             <a:r>
-              <a:rPr sz="7875" b="1">
+              <a:rPr sz="12000" b="1">
                 <a:solidFill>
                   <a:srgbClr val="F7F7F2"/>
                 </a:solidFill>
@@ -4351,7 +4351,7 @@
         </p:blipFill>
         <p:spPr>
           <a:xfrm xmlns:a="http://schemas.openxmlformats.org/drawingml/2006/main">
-            <a:off x="609600" y="6524625"/>
+            <a:off x="609600" y="6400800"/>
             <a:ext cx="1952625" cy="228220"/>
           </a:xfrm>
           <a:prstGeom xmlns:a="http://schemas.openxmlformats.org/drawingml/2006/main" prst="rect">
@@ -4375,8 +4375,8 @@
         </p:nvSpPr>
         <p:spPr>
           <a:xfrm xmlns:a="http://schemas.openxmlformats.org/drawingml/2006/main">
-            <a:off x="11191875" y="6505575"/>
-            <a:ext cx="419100" cy="247650"/>
+            <a:off x="11163300" y="6400800"/>
+            <a:ext cx="419100" cy="228600"/>
           </a:xfrm>
           <a:prstGeom xmlns:a="http://schemas.openxmlformats.org/drawingml/2006/main" prst="rect">
             <a:avLst/>
@@ -4387,7 +4387,7 @@
           </a:ln>
         </p:spPr>
         <p:txBody>
-          <a:bodyPr xmlns:a="http://schemas.openxmlformats.org/drawingml/2006/main" wrap="none" lIns="0" tIns="0" rIns="0" bIns="0" anchor="ctr">
+          <a:bodyPr xmlns:a="http://schemas.openxmlformats.org/drawingml/2006/main" wrap="none" lIns="0" tIns="0" rIns="0" bIns="0" anchor="t">
             <a:noAutofit/>
           </a:bodyPr>
           <a:lstStyle xmlns:a="http://schemas.openxmlformats.org/drawingml/2006/main">
